--- a/docs/flight-price-notifier_v1.1_user_2026_0926.pptx
+++ b/docs/flight-price-notifier_v1.1_user_2026_0926.pptx
@@ -1308,7 +1308,7 @@
           <a:p>
             <a:r>
               <a:rPr lang="en-US" dirty="0"/>
-              <a:t>首頁第三張卡片寫的是「月訂閱制…沒有綁約」，目前是免費模式，口頭說明「目前免費」即可。第一張卡片寫「台北出發」，口頭補充目前也有東京 ✈ 紐約。</a:t>
+              <a:t>首頁第三張卡片寫的是「月訂閱制…沒有綁約」，目前是免費模式，口頭說明「目前免費」即可。第一張卡片不限台北出發，口頭補充目前也有東京 ✈ 紐約。</a:t>
             </a:r>
             <a:endParaRPr lang="en-US" dirty="0"/>
           </a:p>

--- a/docs/flight-price-notifier_v1.1_user_2026_0926.pptx
+++ b/docs/flight-price-notifier_v1.1_user_2026_0926.pptx
@@ -1308,7 +1308,7 @@
           <a:p>
             <a:r>
               <a:rPr lang="en-US" dirty="0"/>
-              <a:t>首頁第三張卡片寫的是「月訂閱制…沒有綁約」，目前是免費模式，口頭說明「目前免費」即可。第一張卡片不限台北出發，口頭補充目前也有東京 ✈ 紐約。</a:t>
+              <a:t>首頁第三張卡片是免費模式的文字「目前免費使用，不想用隨時停。」。第一張卡片不限台北出發，口頭補充目前也有東京 ✈ 紐約。</a:t>
             </a:r>
             <a:endParaRPr lang="en-US" dirty="0"/>
           </a:p>
